--- a/HTML_Fundamentals/decks/Lesson3_Tables_Forms_Layout.pptx
+++ b/HTML_Fundamentals/decks/Lesson3_Tables_Forms_Layout.pptx
@@ -119,26 +119,26 @@
   <p:extLst>
     <p:ext uri="{521415D9-36F7-43E2-AB2F-B90AF26B5E84}">
       <p14:sectionLst xmlns:p14="http://schemas.microsoft.com/office/powerpoint/2010/main">
-        <p14:section name="Opening" id="{9eb98bda-d759-978d-1d7c-465d5c7153d2}">
+        <p14:section name="Opening" id="{08e9b0e4-6754-4a41-3d9a-8d825218c1d4}">
           <p14:sldIdLst>
             <p14:sldId id="256"/>
             <p14:sldId id="257"/>
           </p14:sldIdLst>
         </p14:section>
-        <p14:section name="Tables" id="{6ab8491d-25c6-ffa6-8937-708d7bc243e1}">
+        <p14:section name="Tables" id="{e27de3d3-5619-652c-a3ed-c4e4867694dd}">
           <p14:sldIdLst>
             <p14:sldId id="258"/>
             <p14:sldId id="259"/>
           </p14:sldIdLst>
         </p14:section>
-        <p14:section name="Forms" id="{1c38edbd-e217-a41d-a7da-43e5be62ce33}">
+        <p14:section name="Forms" id="{2a9b5aa6-ddd1-a9c5-612f-29e07dd9ab63}">
           <p14:sldIdLst>
             <p14:sldId id="260"/>
             <p14:sldId id="261"/>
             <p14:sldId id="262"/>
           </p14:sldIdLst>
         </p14:section>
-        <p14:section name="Page layout" id="{7cfb26e6-d7ed-b825-b40b-939a10231cd0}">
+        <p14:section name="Page layout" id="{b5b1bdca-0de7-2f7f-b78c-7ee9977cf423}">
           <p14:sldIdLst>
             <p14:sldId id="263"/>
             <p14:sldId id="264"/>
